--- a/events/eswc2026/sulo.pptx
+++ b/events/eswc2026/sulo.pptx
@@ -1758,8 +1758,8 @@
         </p:nvSpPr>
         <p:spPr>
           <a:xfrm>
-            <a:off x="508400" y="514350"/>
-            <a:ext cx="8127900" cy="2571900"/>
+            <a:off x="2286000" y="514350"/>
+            <a:ext cx="4572000" cy="2571750"/>
           </a:xfrm>
           <a:custGeom>
             <a:avLst/>
@@ -14128,7 +14128,7 @@
         </p:blipFill>
         <p:spPr>
           <a:xfrm>
-            <a:off x="50000" y="304800"/>
+            <a:off x="50000" y="313884"/>
             <a:ext cx="1054650" cy="1629912"/>
           </a:xfrm>
           <a:prstGeom prst="rect">
@@ -14740,26 +14740,110 @@
               <a:buNone/>
             </a:pPr>
             <a:r>
-              <a:rPr lang="nl-NL" sz="1500"/>
-              <a:t>The SOLID pattern uses SULO’s single </a:t>
-            </a:r>
-            <a:r>
-              <a:rPr lang="nl-NL" sz="1500" i="1"/>
-              <a:t>functional </a:t>
-            </a:r>
-            <a:r>
-              <a:rPr lang="nl-NL" sz="1500"/>
+              <a:rPr lang="nl-NL" sz="1500" dirty="0"/>
+              <a:t>The SOLID </a:t>
+            </a:r>
+            <a:r>
+              <a:rPr lang="nl-NL" sz="1500" dirty="0" err="1"/>
+              <a:t>pattern</a:t>
+            </a:r>
+            <a:r>
+              <a:rPr lang="nl-NL" sz="1500" dirty="0"/>
+              <a:t> </a:t>
+            </a:r>
+            <a:r>
+              <a:rPr lang="nl-NL" sz="1500" dirty="0" err="1"/>
+              <a:t>uses</a:t>
+            </a:r>
+            <a:r>
+              <a:rPr lang="nl-NL" sz="1500" dirty="0"/>
+              <a:t> </a:t>
+            </a:r>
+            <a:r>
+              <a:rPr lang="nl-NL" sz="1500" dirty="0" err="1"/>
+              <a:t>SULO’s</a:t>
+            </a:r>
+            <a:r>
+              <a:rPr lang="nl-NL" sz="1500" dirty="0"/>
+              <a:t> single </a:t>
+            </a:r>
+            <a:r>
+              <a:rPr lang="nl-NL" sz="1500" i="1" dirty="0" err="1"/>
+              <a:t>functional</a:t>
+            </a:r>
+            <a:r>
+              <a:rPr lang="nl-NL" sz="1500" i="1" dirty="0"/>
+              <a:t> </a:t>
+            </a:r>
+            <a:r>
+              <a:rPr lang="nl-NL" sz="1500" dirty="0"/>
               <a:t>data property, </a:t>
             </a:r>
             <a:r>
-              <a:rPr lang="nl-NL" sz="1500" b="1"/>
+              <a:rPr lang="nl-NL" sz="1500" b="1" dirty="0" err="1"/>
               <a:t>hasValue</a:t>
             </a:r>
             <a:r>
-              <a:rPr lang="nl-NL" sz="1500"/>
-              <a:t>, to assign a literal value to an InformationObject. </a:t>
-            </a:r>
-            <a:endParaRPr sz="1500"/>
+              <a:rPr lang="nl-NL" sz="1500" dirty="0"/>
+              <a:t>, </a:t>
+            </a:r>
+            <a:r>
+              <a:rPr lang="nl-NL" sz="1500" dirty="0" err="1"/>
+              <a:t>to</a:t>
+            </a:r>
+            <a:r>
+              <a:rPr lang="nl-NL" sz="1500" dirty="0"/>
+              <a:t> </a:t>
+            </a:r>
+            <a:r>
+              <a:rPr lang="nl-NL" sz="1500" dirty="0" err="1"/>
+              <a:t>assign</a:t>
+            </a:r>
+            <a:r>
+              <a:rPr lang="nl-NL" sz="1500" dirty="0"/>
+              <a:t> a </a:t>
+            </a:r>
+            <a:r>
+              <a:rPr lang="nl-NL" sz="1500" dirty="0" err="1"/>
+              <a:t>literal</a:t>
+            </a:r>
+            <a:r>
+              <a:rPr lang="nl-NL" sz="1500" dirty="0"/>
+              <a:t> </a:t>
+            </a:r>
+            <a:r>
+              <a:rPr lang="nl-NL" sz="1500" dirty="0" err="1"/>
+              <a:t>value</a:t>
+            </a:r>
+            <a:r>
+              <a:rPr lang="nl-NL" sz="1500" dirty="0"/>
+              <a:t> </a:t>
+            </a:r>
+            <a:r>
+              <a:rPr lang="nl-NL" sz="1500" dirty="0" err="1"/>
+              <a:t>to</a:t>
+            </a:r>
+            <a:r>
+              <a:rPr lang="nl-NL" sz="1500" dirty="0"/>
+              <a:t> </a:t>
+            </a:r>
+            <a:r>
+              <a:rPr lang="nl-NL" sz="1500" dirty="0" err="1"/>
+              <a:t>an</a:t>
+            </a:r>
+            <a:r>
+              <a:rPr lang="nl-NL" sz="1500" dirty="0"/>
+              <a:t> </a:t>
+            </a:r>
+            <a:r>
+              <a:rPr lang="nl-NL" sz="1500" dirty="0" err="1"/>
+              <a:t>InformationObject</a:t>
+            </a:r>
+            <a:r>
+              <a:rPr lang="nl-NL" sz="1500" dirty="0"/>
+              <a:t>. </a:t>
+            </a:r>
+            <a:endParaRPr sz="1500" dirty="0"/>
           </a:p>
           <a:p>
             <a:pPr marL="0" lvl="0" indent="0" algn="l" rtl="0">
@@ -14771,7 +14855,7 @@
               </a:spcAft>
               <a:buNone/>
             </a:pPr>
-            <a:endParaRPr sz="1500"/>
+            <a:endParaRPr sz="1500" dirty="0"/>
           </a:p>
           <a:p>
             <a:pPr marL="0" lvl="0" indent="0" algn="l" rtl="0">
@@ -14784,74 +14868,246 @@
               <a:buNone/>
             </a:pPr>
             <a:r>
-              <a:rPr lang="nl-NL" sz="1500"/>
-              <a:t>Example: Instead of using arbitrary relations such as </a:t>
-            </a:r>
-            <a:r>
-              <a:rPr lang="nl-NL" sz="1500" b="1"/>
-              <a:t>hasTemperature </a:t>
-            </a:r>
-            <a:r>
-              <a:rPr lang="nl-NL" sz="1500"/>
+              <a:rPr lang="nl-NL" sz="1500" dirty="0" err="1"/>
+              <a:t>Example</a:t>
+            </a:r>
+            <a:r>
+              <a:rPr lang="nl-NL" sz="1500" dirty="0"/>
+              <a:t>: </a:t>
+            </a:r>
+            <a:r>
+              <a:rPr lang="nl-NL" sz="1500" dirty="0" err="1"/>
+              <a:t>Instead</a:t>
+            </a:r>
+            <a:r>
+              <a:rPr lang="nl-NL" sz="1500" dirty="0"/>
+              <a:t> of </a:t>
+            </a:r>
+            <a:r>
+              <a:rPr lang="nl-NL" sz="1500" dirty="0" err="1"/>
+              <a:t>using</a:t>
+            </a:r>
+            <a:r>
+              <a:rPr lang="nl-NL" sz="1500" dirty="0"/>
+              <a:t> </a:t>
+            </a:r>
+            <a:r>
+              <a:rPr lang="nl-NL" sz="1500" dirty="0" err="1"/>
+              <a:t>arbitrary</a:t>
+            </a:r>
+            <a:r>
+              <a:rPr lang="nl-NL" sz="1500" dirty="0"/>
+              <a:t> relations </a:t>
+            </a:r>
+            <a:r>
+              <a:rPr lang="nl-NL" sz="1500" dirty="0" err="1"/>
+              <a:t>such</a:t>
+            </a:r>
+            <a:r>
+              <a:rPr lang="nl-NL" sz="1500" dirty="0"/>
+              <a:t> as </a:t>
+            </a:r>
+            <a:r>
+              <a:rPr lang="nl-NL" sz="1500" b="1" dirty="0" err="1"/>
+              <a:t>hasTemperature</a:t>
+            </a:r>
+            <a:r>
+              <a:rPr lang="nl-NL" sz="1500" b="1" dirty="0"/>
+              <a:t> </a:t>
+            </a:r>
+            <a:r>
+              <a:rPr lang="nl-NL" sz="1500" dirty="0"/>
               <a:t>or </a:t>
             </a:r>
             <a:r>
-              <a:rPr lang="nl-NL" sz="1500" b="1"/>
+              <a:rPr lang="nl-NL" sz="1500" b="1" dirty="0" err="1"/>
               <a:t>hasTemperatureInCelcius</a:t>
             </a:r>
             <a:r>
-              <a:rPr lang="nl-NL" sz="1500"/>
-              <a:t>, the design pattern reuses SULO’s </a:t>
-            </a:r>
-            <a:r>
-              <a:rPr lang="nl-NL" sz="1500" b="1"/>
+              <a:rPr lang="nl-NL" sz="1500" dirty="0"/>
+              <a:t>, </a:t>
+            </a:r>
+            <a:r>
+              <a:rPr lang="nl-NL" sz="1500" dirty="0" err="1"/>
+              <a:t>the</a:t>
+            </a:r>
+            <a:r>
+              <a:rPr lang="nl-NL" sz="1500" dirty="0"/>
+              <a:t> design </a:t>
+            </a:r>
+            <a:r>
+              <a:rPr lang="nl-NL" sz="1500" dirty="0" err="1"/>
+              <a:t>pattern</a:t>
+            </a:r>
+            <a:r>
+              <a:rPr lang="nl-NL" sz="1500" dirty="0"/>
+              <a:t> </a:t>
+            </a:r>
+            <a:r>
+              <a:rPr lang="nl-NL" sz="1500" dirty="0" err="1"/>
+              <a:t>reuses</a:t>
+            </a:r>
+            <a:r>
+              <a:rPr lang="nl-NL" sz="1500" dirty="0"/>
+              <a:t> </a:t>
+            </a:r>
+            <a:r>
+              <a:rPr lang="nl-NL" sz="1500" dirty="0" err="1"/>
+              <a:t>SULO’s</a:t>
+            </a:r>
+            <a:r>
+              <a:rPr lang="nl-NL" sz="1500" dirty="0"/>
+              <a:t> </a:t>
+            </a:r>
+            <a:r>
+              <a:rPr lang="nl-NL" sz="1500" b="1" dirty="0" err="1"/>
               <a:t>hasValue</a:t>
             </a:r>
             <a:r>
-              <a:rPr lang="nl-NL" sz="1500"/>
+              <a:rPr lang="nl-NL" sz="1500" dirty="0"/>
               <a:t>, </a:t>
             </a:r>
             <a:r>
-              <a:rPr lang="nl-NL" sz="1500" b="1"/>
+              <a:rPr lang="nl-NL" sz="1500" b="1" dirty="0" err="1"/>
               <a:t>hasFeature</a:t>
             </a:r>
             <a:r>
-              <a:rPr lang="nl-NL" sz="1500"/>
+              <a:rPr lang="nl-NL" sz="1500" dirty="0"/>
               <a:t>, </a:t>
             </a:r>
             <a:r>
-              <a:rPr lang="nl-NL" sz="1500" b="1"/>
-              <a:t>refersTo, </a:t>
-            </a:r>
-            <a:r>
-              <a:rPr lang="nl-NL" sz="1500"/>
-              <a:t>and </a:t>
-            </a:r>
-            <a:r>
-              <a:rPr lang="nl-NL" sz="1500" b="1"/>
-              <a:t>hasPart </a:t>
-            </a:r>
-            <a:r>
-              <a:rPr lang="nl-NL" sz="1500"/>
-              <a:t>properties in conjunction with two externally defined classes, namely </a:t>
-            </a:r>
-            <a:r>
-              <a:rPr lang="nl-NL" sz="1500" b="1"/>
-              <a:t>Temperature </a:t>
-            </a:r>
-            <a:r>
-              <a:rPr lang="nl-NL" sz="1500"/>
-              <a:t>from PATO and </a:t>
-            </a:r>
-            <a:r>
-              <a:rPr lang="nl-NL" sz="1500" b="1"/>
-              <a:t>Celcius </a:t>
-            </a:r>
-            <a:r>
-              <a:rPr lang="nl-NL" sz="1500"/>
-              <a:t>from the Unit Ontology</a:t>
-            </a:r>
-            <a:endParaRPr sz="1500"/>
+              <a:rPr lang="nl-NL" sz="1500" b="1" dirty="0" err="1"/>
+              <a:t>refersTo</a:t>
+            </a:r>
+            <a:r>
+              <a:rPr lang="nl-NL" sz="1500" b="1" dirty="0"/>
+              <a:t>, </a:t>
+            </a:r>
+            <a:r>
+              <a:rPr lang="nl-NL" sz="1500" dirty="0" err="1"/>
+              <a:t>and</a:t>
+            </a:r>
+            <a:r>
+              <a:rPr lang="nl-NL" sz="1500" dirty="0"/>
+              <a:t> </a:t>
+            </a:r>
+            <a:r>
+              <a:rPr lang="nl-NL" sz="1500" b="1" dirty="0" err="1"/>
+              <a:t>hasPart</a:t>
+            </a:r>
+            <a:r>
+              <a:rPr lang="nl-NL" sz="1500" b="1" dirty="0"/>
+              <a:t> </a:t>
+            </a:r>
+            <a:r>
+              <a:rPr lang="nl-NL" sz="1500" dirty="0" err="1"/>
+              <a:t>properties</a:t>
+            </a:r>
+            <a:r>
+              <a:rPr lang="nl-NL" sz="1500" dirty="0"/>
+              <a:t> in </a:t>
+            </a:r>
+            <a:r>
+              <a:rPr lang="nl-NL" sz="1500" dirty="0" err="1"/>
+              <a:t>conjunction</a:t>
+            </a:r>
+            <a:r>
+              <a:rPr lang="nl-NL" sz="1500" dirty="0"/>
+              <a:t> </a:t>
+            </a:r>
+            <a:r>
+              <a:rPr lang="nl-NL" sz="1500" dirty="0" err="1"/>
+              <a:t>with</a:t>
+            </a:r>
+            <a:r>
+              <a:rPr lang="nl-NL" sz="1500" dirty="0"/>
+              <a:t> </a:t>
+            </a:r>
+            <a:r>
+              <a:rPr lang="nl-NL" sz="1500" dirty="0" err="1"/>
+              <a:t>two</a:t>
+            </a:r>
+            <a:r>
+              <a:rPr lang="nl-NL" sz="1500" dirty="0"/>
+              <a:t> </a:t>
+            </a:r>
+            <a:r>
+              <a:rPr lang="nl-NL" sz="1500" dirty="0" err="1"/>
+              <a:t>externally</a:t>
+            </a:r>
+            <a:r>
+              <a:rPr lang="nl-NL" sz="1500" dirty="0"/>
+              <a:t> </a:t>
+            </a:r>
+            <a:r>
+              <a:rPr lang="nl-NL" sz="1500" dirty="0" err="1"/>
+              <a:t>defined</a:t>
+            </a:r>
+            <a:r>
+              <a:rPr lang="nl-NL" sz="1500" dirty="0"/>
+              <a:t> classes, </a:t>
+            </a:r>
+            <a:r>
+              <a:rPr lang="nl-NL" sz="1500" dirty="0" err="1"/>
+              <a:t>namely</a:t>
+            </a:r>
+            <a:r>
+              <a:rPr lang="nl-NL" sz="1500" dirty="0"/>
+              <a:t> </a:t>
+            </a:r>
+            <a:r>
+              <a:rPr lang="nl-NL" sz="1500" b="1" dirty="0" err="1"/>
+              <a:t>Temperature</a:t>
+            </a:r>
+            <a:r>
+              <a:rPr lang="nl-NL" sz="1500" b="1" dirty="0"/>
+              <a:t> </a:t>
+            </a:r>
+            <a:r>
+              <a:rPr lang="nl-NL" sz="1500" dirty="0" err="1"/>
+              <a:t>from</a:t>
+            </a:r>
+            <a:r>
+              <a:rPr lang="nl-NL" sz="1500" dirty="0"/>
+              <a:t> PATO </a:t>
+            </a:r>
+            <a:r>
+              <a:rPr lang="nl-NL" sz="1500" dirty="0" err="1"/>
+              <a:t>and</a:t>
+            </a:r>
+            <a:r>
+              <a:rPr lang="nl-NL" sz="1500" dirty="0"/>
+              <a:t> </a:t>
+            </a:r>
+            <a:r>
+              <a:rPr lang="nl-NL" sz="1500" b="1" dirty="0" err="1"/>
+              <a:t>Celcius</a:t>
+            </a:r>
+            <a:r>
+              <a:rPr lang="nl-NL" sz="1500" b="1" dirty="0"/>
+              <a:t> </a:t>
+            </a:r>
+            <a:r>
+              <a:rPr lang="nl-NL" sz="1500" dirty="0" err="1"/>
+              <a:t>from</a:t>
+            </a:r>
+            <a:r>
+              <a:rPr lang="nl-NL" sz="1500" dirty="0"/>
+              <a:t> </a:t>
+            </a:r>
+            <a:r>
+              <a:rPr lang="nl-NL" sz="1500" dirty="0" err="1"/>
+              <a:t>the</a:t>
+            </a:r>
+            <a:r>
+              <a:rPr lang="nl-NL" sz="1500" dirty="0"/>
+              <a:t> Unit </a:t>
+            </a:r>
+            <a:r>
+              <a:rPr lang="nl-NL" sz="1500" dirty="0" err="1"/>
+              <a:t>Ontology</a:t>
+            </a:r>
+            <a:endParaRPr sz="1500" dirty="0"/>
           </a:p>
           <a:p>
             <a:pPr marL="0" lvl="0" indent="0" algn="l" rtl="0">
@@ -14863,7 +15119,7 @@
               </a:spcAft>
               <a:buNone/>
             </a:pPr>
-            <a:endParaRPr sz="1500"/>
+            <a:endParaRPr sz="1500" dirty="0"/>
           </a:p>
           <a:p>
             <a:pPr marL="0" lvl="0" indent="0" algn="l" rtl="0">
@@ -14876,10 +15132,86 @@
               <a:buNone/>
             </a:pPr>
             <a:r>
-              <a:rPr lang="nl-NL" sz="1500"/>
-              <a:t>Hence, developing an ontology of InformationObjects is encouraged, rather than a proliferation of data properties.</a:t>
-            </a:r>
-            <a:endParaRPr sz="1500"/>
+              <a:rPr lang="nl-NL" sz="1500" dirty="0" err="1"/>
+              <a:t>Hence</a:t>
+            </a:r>
+            <a:r>
+              <a:rPr lang="nl-NL" sz="1500" dirty="0"/>
+              <a:t>, </a:t>
+            </a:r>
+            <a:r>
+              <a:rPr lang="nl-NL" sz="1500" dirty="0" err="1"/>
+              <a:t>developing</a:t>
+            </a:r>
+            <a:r>
+              <a:rPr lang="nl-NL" sz="1500" dirty="0"/>
+              <a:t> </a:t>
+            </a:r>
+            <a:r>
+              <a:rPr lang="nl-NL" sz="1500" dirty="0" err="1"/>
+              <a:t>an</a:t>
+            </a:r>
+            <a:r>
+              <a:rPr lang="nl-NL" sz="1500" dirty="0"/>
+              <a:t> </a:t>
+            </a:r>
+            <a:r>
+              <a:rPr lang="nl-NL" sz="1500" dirty="0" err="1"/>
+              <a:t>ontology</a:t>
+            </a:r>
+            <a:r>
+              <a:rPr lang="nl-NL" sz="1500" dirty="0"/>
+              <a:t> of </a:t>
+            </a:r>
+            <a:r>
+              <a:rPr lang="nl-NL" sz="1500" dirty="0" err="1"/>
+              <a:t>InformationObjects</a:t>
+            </a:r>
+            <a:r>
+              <a:rPr lang="nl-NL" sz="1500" dirty="0"/>
+              <a:t> is </a:t>
+            </a:r>
+            <a:r>
+              <a:rPr lang="nl-NL" sz="1500" dirty="0" err="1"/>
+              <a:t>encouraged</a:t>
+            </a:r>
+            <a:r>
+              <a:rPr lang="nl-NL" sz="1500" dirty="0"/>
+              <a:t>, </a:t>
+            </a:r>
+            <a:r>
+              <a:rPr lang="nl-NL" sz="1500" dirty="0" err="1"/>
+              <a:t>rather</a:t>
+            </a:r>
+            <a:r>
+              <a:rPr lang="nl-NL" sz="1500" dirty="0"/>
+              <a:t> </a:t>
+            </a:r>
+            <a:r>
+              <a:rPr lang="nl-NL" sz="1500" dirty="0" err="1"/>
+              <a:t>than</a:t>
+            </a:r>
+            <a:r>
+              <a:rPr lang="nl-NL" sz="1500" dirty="0"/>
+              <a:t> a </a:t>
+            </a:r>
+            <a:r>
+              <a:rPr lang="nl-NL" sz="1500" dirty="0" err="1"/>
+              <a:t>proliferation</a:t>
+            </a:r>
+            <a:r>
+              <a:rPr lang="nl-NL" sz="1500" dirty="0"/>
+              <a:t> of data </a:t>
+            </a:r>
+            <a:r>
+              <a:rPr lang="nl-NL" sz="1500" dirty="0" err="1"/>
+              <a:t>properties</a:t>
+            </a:r>
+            <a:r>
+              <a:rPr lang="nl-NL" sz="1500" dirty="0"/>
+              <a:t>.</a:t>
+            </a:r>
+            <a:endParaRPr sz="1500" dirty="0"/>
           </a:p>
         </p:txBody>
       </p:sp>
